--- a/Topic_A/Exam_Practice/AT-A-L12_Writing_Workshop_Topic_A_Review_and_Assessment.pptx
+++ b/Topic_A/Exam_Practice/AT-A-L12_Writing_Workshop_Topic_A_Review_and_Assessment.pptx
@@ -784,7 +784,11 @@
           <a:lstStyle/>
           <a:p>
             <a:r>
-              <a:rPr lang="en-US" dirty="0"/>
+              <a:rPr lang="ar-SA" dirty="0">
+                <a:latin typeface="Amiri" pitchFamily="2" charset="-78"/>
+                <a:ea typeface="Amiri" pitchFamily="2" charset="-78"/>
+                <a:cs typeface="Amiri" pitchFamily="2" charset="-78"/>
+              </a:rPr>
               <a:t>Q3 (3 min to choose and read). Title (أ) suits Core and Develop; title (ب) suits Stretch.</a:t>
             </a:r>
             <a:endParaRPr lang="en-US" dirty="0"/>
@@ -1403,7 +1407,11 @@
           <a:lstStyle/>
           <a:p>
             <a:r>
-              <a:rPr lang="en-US" dirty="0"/>
+              <a:rPr lang="ar-SA" dirty="0">
+                <a:latin typeface="Amiri" pitchFamily="2" charset="-78"/>
+                <a:ea typeface="Amiri" pitchFamily="2" charset="-78"/>
+                <a:cs typeface="Amiri" pitchFamily="2" charset="-78"/>
+              </a:rPr>
               <a:t>WELCOME (1 min) — while students join.
 • Greet each student by name as they arrive: السَّلَامُ عَلَيْكُمْ. Take the register (Pastoral Tracker: attendance 0/1).
 • 2-MINUTE CHECK-IN (SEND training): a private chat to any student who seemed unsettled last lesson — “Are you okay today? 👍 / 👎”.
@@ -1936,7 +1944,11 @@
           <a:lstStyle/>
           <a:p>
             <a:r>
-              <a:rPr lang="en-US" dirty="0"/>
+              <a:rPr lang="ar-SA" dirty="0">
+                <a:latin typeface="Amiri" pitchFamily="2" charset="-78"/>
+                <a:ea typeface="Amiri" pitchFamily="2" charset="-78"/>
+                <a:cs typeface="Amiri" pitchFamily="2" charset="-78"/>
+              </a:rPr>
               <a:t>Question words: صِفِي (describe) · مَا (what) · هَلْ (yes/no) · مَاذَا (what) · مَتَى (when) · اسْأَلِي (ask) — two instructions and four questions.</a:t>
             </a:r>
             <a:endParaRPr lang="en-US" dirty="0"/>
@@ -2508,6 +2520,7 @@
                   <a:srgbClr val="D4AF37"/>
                 </a:solidFill>
                 <a:latin typeface="Amiri" pitchFamily="2" charset="-78"/>
+                <a:ea typeface="Amiri" pitchFamily="2" charset="-78"/>
                 <a:cs typeface="Amiri" pitchFamily="2" charset="-78"/>
               </a:rPr>
               <a:t>م</a:t>
@@ -2714,6 +2727,7 @@
                   <a:srgbClr val="D4AF37"/>
                 </a:solidFill>
                 <a:latin typeface="Amiri" pitchFamily="2" charset="-78"/>
+                <a:ea typeface="Amiri" pitchFamily="2" charset="-78"/>
                 <a:cs typeface="Amiri" pitchFamily="2" charset="-78"/>
               </a:rPr>
               <a:t>وَرْشَةُ الكِتَابَةِ — امْتِحَانٌ تَجْرِيبِيٌّ</a:t>
@@ -3171,6 +3185,7 @@
                   <a:srgbClr val="D4AF37"/>
                 </a:solidFill>
                 <a:latin typeface="Amiri" pitchFamily="2" charset="-78"/>
+                <a:ea typeface="Amiri" pitchFamily="2" charset="-78"/>
                 <a:cs typeface="Amiri" pitchFamily="2" charset="-78"/>
               </a:rPr>
               <a:t>م</a:t>
@@ -3491,6 +3506,7 @@
                   <a:srgbClr val="8A6D1E"/>
                 </a:solidFill>
                 <a:latin typeface="Amiri" pitchFamily="2" charset="-78"/>
+                <a:ea typeface="Amiri" pitchFamily="2" charset="-78"/>
                 <a:cs typeface="Amiri" pitchFamily="2" charset="-78"/>
               </a:rPr>
               <a:t>نَمُوذَجُ الإِجَابَةِ</a:t>
@@ -3604,6 +3620,7 @@
                   <a:srgbClr val="1F2A37"/>
                 </a:solidFill>
                 <a:latin typeface="Amiri" pitchFamily="2" charset="-78"/>
+                <a:ea typeface="Amiri" pitchFamily="2" charset="-78"/>
                 <a:cs typeface="Amiri" pitchFamily="2" charset="-78"/>
               </a:rPr>
               <a:t>عَزِيزَتِي السَّيِّدَةَ لَيْلَى،</a:t>
@@ -3623,6 +3640,7 @@
                   <a:srgbClr val="1F2A37"/>
                 </a:solidFill>
                 <a:latin typeface="Amiri" pitchFamily="2" charset="-78"/>
+                <a:ea typeface="Amiri" pitchFamily="2" charset="-78"/>
                 <a:cs typeface="Amiri" pitchFamily="2" charset="-78"/>
               </a:rPr>
               <a:t>أَنَا هَالَةُ، الطَّالِبَةُ الَّتِي سَتَسْكُنُ عِنْدَكُمْ فِي الصَّيْفِ. أَسْتَيْقِظُ عَادَةً فِي السَّاعَةِ السَّابِعَةِ، وَأَنَامُ فِي العَاشِرَةِ. أُحِبُّ الدَّجَاجَ وَالأُرْزَ وَالسَّلَطَةَ، لٰكِنِّي لَا آكُلُ السَّمَكَ. عِنْدِي حَسَاسِيَّةٌ مِنَ الفُولِ السُّودَانِيِّ. أَمْسِ اشْتَرَيْتُ تَذْكِرَةَ الطَّائِرَةِ، وَسَأَصِلُ يَوْمَ السَّبْتِ فِي السَّاعَةِ الرَّابِعَةِ. هَلْ يُمْكِنُ أَنْ تُخْبِرِينِي كَيْفَ أَصِلُ إِلَى بَيْتِكُمْ مِنَ المَطَارِ؟</a:t>
@@ -3642,6 +3660,7 @@
                   <a:srgbClr val="1F2A37"/>
                 </a:solidFill>
                 <a:latin typeface="Amiri" pitchFamily="2" charset="-78"/>
+                <a:ea typeface="Amiri" pitchFamily="2" charset="-78"/>
                 <a:cs typeface="Amiri" pitchFamily="2" charset="-78"/>
               </a:rPr>
               <a:t>مَعَ الشُّكْرِ،</a:t>
@@ -3661,6 +3680,7 @@
                   <a:srgbClr val="1F2A37"/>
                 </a:solidFill>
                 <a:latin typeface="Amiri" pitchFamily="2" charset="-78"/>
+                <a:ea typeface="Amiri" pitchFamily="2" charset="-78"/>
                 <a:cs typeface="Amiri" pitchFamily="2" charset="-78"/>
               </a:rPr>
               <a:t>هَالَةُ</a:t>
@@ -3824,11 +3844,12 @@
               <a:buNone/>
             </a:pPr>
             <a:r>
-              <a:rPr lang="en-US" sz="950" b="1" dirty="0">
+              <a:rPr lang="ar-SA" sz="950" b="1" dirty="0">
                 <a:solidFill>
                   <a:srgbClr val="FFFFFF"/>
                 </a:solidFill>
                 <a:latin typeface="Calibri" pitchFamily="34" charset="0"/>
+                <a:ea typeface="Amiri" pitchFamily="2" charset="-78"/>
                 <a:cs typeface="Amiri" pitchFamily="2" charset="-78"/>
               </a:rPr>
               <a:t>أَسْتَيْقِظُ عَادَةً</a:t>
@@ -3889,11 +3910,12 @@
               <a:buNone/>
             </a:pPr>
             <a:r>
-              <a:rPr lang="en-US" sz="950" b="1" dirty="0">
+              <a:rPr lang="ar-SA" sz="950" b="1" dirty="0">
                 <a:solidFill>
                   <a:srgbClr val="FFFFFF"/>
                 </a:solidFill>
                 <a:latin typeface="Calibri" pitchFamily="34" charset="0"/>
+                <a:ea typeface="Amiri" pitchFamily="2" charset="-78"/>
                 <a:cs typeface="Amiri" pitchFamily="2" charset="-78"/>
               </a:rPr>
               <a:t>لٰكِنِّي لَا آكُلُ</a:t>
@@ -3954,11 +3976,12 @@
               <a:buNone/>
             </a:pPr>
             <a:r>
-              <a:rPr lang="en-US" sz="950" b="1" dirty="0">
+              <a:rPr lang="ar-SA" sz="950" b="1" dirty="0">
                 <a:solidFill>
                   <a:srgbClr val="FFFFFF"/>
                 </a:solidFill>
                 <a:latin typeface="Calibri" pitchFamily="34" charset="0"/>
+                <a:ea typeface="Amiri" pitchFamily="2" charset="-78"/>
                 <a:cs typeface="Amiri" pitchFamily="2" charset="-78"/>
               </a:rPr>
               <a:t>عِنْدِي حَسَاسِيَّةٌ</a:t>
@@ -4019,11 +4042,12 @@
               <a:buNone/>
             </a:pPr>
             <a:r>
-              <a:rPr lang="en-US" sz="950" b="1" dirty="0">
+              <a:rPr lang="ar-SA" sz="950" b="1" dirty="0">
                 <a:solidFill>
                   <a:srgbClr val="FFFFFF"/>
                 </a:solidFill>
                 <a:latin typeface="Calibri" pitchFamily="34" charset="0"/>
+                <a:ea typeface="Amiri" pitchFamily="2" charset="-78"/>
                 <a:cs typeface="Amiri" pitchFamily="2" charset="-78"/>
               </a:rPr>
               <a:t>سَأَصِلُ</a:t>
@@ -4157,6 +4181,7 @@
                   <a:srgbClr val="D4AF37"/>
                 </a:solidFill>
                 <a:latin typeface="Amiri" pitchFamily="2" charset="-78"/>
+                <a:ea typeface="Amiri" pitchFamily="2" charset="-78"/>
                 <a:cs typeface="Amiri" pitchFamily="2" charset="-78"/>
               </a:rPr>
               <a:t>م</a:t>
@@ -4477,6 +4502,7 @@
                   <a:srgbClr val="8A6D1E"/>
                 </a:solidFill>
                 <a:latin typeface="Amiri" pitchFamily="2" charset="-78"/>
+                <a:ea typeface="Amiri" pitchFamily="2" charset="-78"/>
                 <a:cs typeface="Amiri" pitchFamily="2" charset="-78"/>
               </a:rPr>
               <a:t>نَمُوذَجُ الإِجَابَةِ</a:t>
@@ -4590,6 +4616,7 @@
                   <a:srgbClr val="1F2A37"/>
                 </a:solidFill>
                 <a:latin typeface="Amiri" pitchFamily="2" charset="-78"/>
+                <a:ea typeface="Amiri" pitchFamily="2" charset="-78"/>
                 <a:cs typeface="Amiri" pitchFamily="2" charset="-78"/>
               </a:rPr>
               <a:t>عَزِيزَتِي السَّيِّدَةَ لَيْلَى،</a:t>
@@ -4609,6 +4636,7 @@
                   <a:srgbClr val="1F2A37"/>
                 </a:solidFill>
                 <a:latin typeface="Amiri" pitchFamily="2" charset="-78"/>
+                <a:ea typeface="Amiri" pitchFamily="2" charset="-78"/>
                 <a:cs typeface="Amiri" pitchFamily="2" charset="-78"/>
               </a:rPr>
               <a:t>تَحِيَّةً طَيِّبَةً، وَبَعْدُ، فَأَنَا هَالَةُ، الطَّالِبَةُ الَّتِي سَتَنْزِلُ عِنْدَكُمْ فِي بَرْنَامَجِ التَّبَادُلِ. أَسْتَيْقِظُ عَادَةً فِي السَّابِعَةِ، وَأُحِبُّ أَنْ أَمْشِيَ قَلِيلًا قَبْلَ الفُطُورِ، وَأَنَامُ عَادَةً فِي العَاشِرَةِ وَالنِّصْفِ. آكُلُ كُلَّ شَيْءٍ تَقْرِيبًا، وَأُحِبُّ الأَطْبَاقَ العَرَبِيَّةَ خُصُوصًا، غَيْرَ أَنَّ عِنْدِي حَسَاسِيَّةً شَدِيدَةً مِنَ الفُولِ السُّودَانِيِّ، فَأَرْجُو أَنْ تَنْتَبِهُوا لِذٰلِكَ. أَمْسِ حَجَزْتُ رِحْلَتِي؛ سَأَصِلُ يَوْمَ السَّبْتِ بَعْدَ الظُّهْرِ، وَإِذَا تَأَخَّرَتِ الطَّائِرَةُ، سَأَتَّصِلُ بِكُمْ فَوْرًا، وَسَأُرْسِلُ لَكُمْ رِسَالَةً عِنْدَ وُصُولِي. هَلْ مِنَ الأَفْضَلِ أَنْ آخُذَ القِطَارَ أَمْ سَيَّارَةَ أُجْرَةٍ إِلَى بَيْتِكُمْ؟</a:t>
@@ -4628,6 +4656,7 @@
                   <a:srgbClr val="1F2A37"/>
                 </a:solidFill>
                 <a:latin typeface="Amiri" pitchFamily="2" charset="-78"/>
+                <a:ea typeface="Amiri" pitchFamily="2" charset="-78"/>
                 <a:cs typeface="Amiri" pitchFamily="2" charset="-78"/>
               </a:rPr>
               <a:t>مَعَ خَالِصِ الشُّكْرِ،</a:t>
@@ -4647,6 +4676,7 @@
                   <a:srgbClr val="1F2A37"/>
                 </a:solidFill>
                 <a:latin typeface="Amiri" pitchFamily="2" charset="-78"/>
+                <a:ea typeface="Amiri" pitchFamily="2" charset="-78"/>
                 <a:cs typeface="Amiri" pitchFamily="2" charset="-78"/>
               </a:rPr>
               <a:t>هَالَةُ</a:t>
@@ -4810,11 +4840,12 @@
               <a:buNone/>
             </a:pPr>
             <a:r>
-              <a:rPr lang="en-US" sz="950" b="1" dirty="0">
+              <a:rPr lang="ar-SA" sz="950" b="1" dirty="0">
                 <a:solidFill>
                   <a:srgbClr val="FFFFFF"/>
                 </a:solidFill>
                 <a:latin typeface="Calibri" pitchFamily="34" charset="0"/>
+                <a:ea typeface="Amiri" pitchFamily="2" charset="-78"/>
                 <a:cs typeface="Amiri" pitchFamily="2" charset="-78"/>
               </a:rPr>
               <a:t>أُحِبُّ أَنْ أَمْشِيَ</a:t>
@@ -4875,11 +4906,12 @@
               <a:buNone/>
             </a:pPr>
             <a:r>
-              <a:rPr lang="en-US" sz="950" b="1" dirty="0">
+              <a:rPr lang="ar-SA" sz="950" b="1" dirty="0">
                 <a:solidFill>
                   <a:srgbClr val="FFFFFF"/>
                 </a:solidFill>
                 <a:latin typeface="Calibri" pitchFamily="34" charset="0"/>
+                <a:ea typeface="Amiri" pitchFamily="2" charset="-78"/>
                 <a:cs typeface="Amiri" pitchFamily="2" charset="-78"/>
               </a:rPr>
               <a:t>غَيْرَ أَنَّ عِنْدِي</a:t>
@@ -4940,11 +4972,12 @@
               <a:buNone/>
             </a:pPr>
             <a:r>
-              <a:rPr lang="en-US" sz="950" b="1" dirty="0">
+              <a:rPr lang="ar-SA" sz="950" b="1" dirty="0">
                 <a:solidFill>
                   <a:srgbClr val="FFFFFF"/>
                 </a:solidFill>
                 <a:latin typeface="Calibri" pitchFamily="34" charset="0"/>
+                <a:ea typeface="Amiri" pitchFamily="2" charset="-78"/>
                 <a:cs typeface="Amiri" pitchFamily="2" charset="-78"/>
               </a:rPr>
               <a:t>إِذَا تَأَخَّرَتْ … سَأَتَّصِلُ</a:t>
@@ -5005,11 +5038,12 @@
               <a:buNone/>
             </a:pPr>
             <a:r>
-              <a:rPr lang="en-US" sz="950" b="1" dirty="0">
+              <a:rPr lang="ar-SA" sz="950" b="1" dirty="0">
                 <a:solidFill>
                   <a:srgbClr val="FFFFFF"/>
                 </a:solidFill>
                 <a:latin typeface="Calibri" pitchFamily="34" charset="0"/>
+                <a:ea typeface="Amiri" pitchFamily="2" charset="-78"/>
                 <a:cs typeface="Amiri" pitchFamily="2" charset="-78"/>
               </a:rPr>
               <a:t>القِطَارَ أَمْ سَيَّارَةَ أُجْرَةٍ</a:t>
@@ -5143,6 +5177,7 @@
                   <a:srgbClr val="D4AF37"/>
                 </a:solidFill>
                 <a:latin typeface="Amiri" pitchFamily="2" charset="-78"/>
+                <a:ea typeface="Amiri" pitchFamily="2" charset="-78"/>
                 <a:cs typeface="Amiri" pitchFamily="2" charset="-78"/>
               </a:rPr>
               <a:t>م</a:t>
@@ -5463,6 +5498,7 @@
                   <a:srgbClr val="8A6D1E"/>
                 </a:solidFill>
                 <a:latin typeface="Amiri" pitchFamily="2" charset="-78"/>
+                <a:ea typeface="Amiri" pitchFamily="2" charset="-78"/>
                 <a:cs typeface="Amiri" pitchFamily="2" charset="-78"/>
               </a:rPr>
               <a:t>اخْتَرْ عُنْوَانًا وَاحِدًا</a:t>
@@ -5743,6 +5779,7 @@
                   <a:srgbClr val="1B3B6F"/>
                 </a:solidFill>
                 <a:latin typeface="Amiri" pitchFamily="2" charset="-78"/>
+                <a:ea typeface="Amiri" pitchFamily="2" charset="-78"/>
                 <a:cs typeface="Amiri" pitchFamily="2" charset="-78"/>
               </a:rPr>
               <a:t>يَوْمِي المِثَالِيُّ</a:t>
@@ -5781,6 +5818,7 @@
                   <a:srgbClr val="1B3B6F"/>
                 </a:solidFill>
                 <a:latin typeface="Amiri" pitchFamily="2" charset="-78"/>
+                <a:ea typeface="Amiri" pitchFamily="2" charset="-78"/>
                 <a:cs typeface="Amiri" pitchFamily="2" charset="-78"/>
               </a:rPr>
               <a:t>(أ)</a:t>
@@ -5887,6 +5925,7 @@
                   <a:srgbClr val="1B3B6F"/>
                 </a:solidFill>
                 <a:latin typeface="Amiri" pitchFamily="2" charset="-78"/>
+                <a:ea typeface="Amiri" pitchFamily="2" charset="-78"/>
                 <a:cs typeface="Amiri" pitchFamily="2" charset="-78"/>
               </a:rPr>
               <a:t>مَتَى تَسْتَيْقِظُ؟ وَمَاذَا تَأْكُلُ؟ · الرِّيَاضَةُ وَالمُوَاصَلَاتُ وَالأَمَاكِنُ · يَوْمٌ مَاضٍ كَانَ مُخْتَلِفًا · رَأْيُكَ وَخُطَطُكَ</a:t>
@@ -6018,6 +6057,7 @@
                   <a:srgbClr val="1B3B6F"/>
                 </a:solidFill>
                 <a:latin typeface="Amiri" pitchFamily="2" charset="-78"/>
+                <a:ea typeface="Amiri" pitchFamily="2" charset="-78"/>
                 <a:cs typeface="Amiri" pitchFamily="2" charset="-78"/>
               </a:rPr>
               <a:t>الحَيَاةُ العَصْرِيَّةُ وَالصِّحَّةُ</a:t>
@@ -6056,6 +6096,7 @@
                   <a:srgbClr val="1B3B6F"/>
                 </a:solidFill>
                 <a:latin typeface="Amiri" pitchFamily="2" charset="-78"/>
+                <a:ea typeface="Amiri" pitchFamily="2" charset="-78"/>
                 <a:cs typeface="Amiri" pitchFamily="2" charset="-78"/>
               </a:rPr>
               <a:t>(ب)</a:t>
@@ -6162,6 +6203,7 @@
                   <a:srgbClr val="1B3B6F"/>
                 </a:solidFill>
                 <a:latin typeface="Amiri" pitchFamily="2" charset="-78"/>
+                <a:ea typeface="Amiri" pitchFamily="2" charset="-78"/>
                 <a:cs typeface="Amiri" pitchFamily="2" charset="-78"/>
               </a:rPr>
               <a:t>هَلِ الحَيَاةُ اليَوْمَ أَسْهَلُ؟ · المَاضِي وَالحَاضِرُ: الأَكْلُ وَالحَرَكَةُ وَالنَّوْمُ · تَجْرِبَةٌ مِنْ أُسْرَتِكَ · رَأْيُكَ وَاقْتِرَاحُكَ</a:t>
@@ -6361,6 +6403,7 @@
                   <a:srgbClr val="D4AF37"/>
                 </a:solidFill>
                 <a:latin typeface="Amiri" pitchFamily="2" charset="-78"/>
+                <a:ea typeface="Amiri" pitchFamily="2" charset="-78"/>
                 <a:cs typeface="Amiri" pitchFamily="2" charset="-78"/>
               </a:rPr>
               <a:t>م</a:t>
@@ -6681,6 +6724,7 @@
                   <a:srgbClr val="8A6D1E"/>
                 </a:solidFill>
                 <a:latin typeface="Amiri" pitchFamily="2" charset="-78"/>
+                <a:ea typeface="Amiri" pitchFamily="2" charset="-78"/>
                 <a:cs typeface="Amiri" pitchFamily="2" charset="-78"/>
               </a:rPr>
               <a:t>خُطَّةُ الكِتَابَةِ</a:t>
@@ -7305,6 +7349,7 @@
                   <a:srgbClr val="1B3B6F"/>
                 </a:solidFill>
                 <a:latin typeface="Amiri" pitchFamily="2" charset="-78"/>
+                <a:ea typeface="Amiri" pitchFamily="2" charset="-78"/>
                 <a:cs typeface="Amiri" pitchFamily="2" charset="-78"/>
               </a:rPr>
               <a:t>أَسْتَيْقِظُ فِي الثَّامِنَةِ يَوْمَ الجُمُعَةِ.</a:t>
@@ -7404,6 +7449,7 @@
                   <a:srgbClr val="1B3B6F"/>
                 </a:solidFill>
                 <a:latin typeface="Amiri" pitchFamily="2" charset="-78"/>
+                <a:ea typeface="Amiri" pitchFamily="2" charset="-78"/>
                 <a:cs typeface="Amiri" pitchFamily="2" charset="-78"/>
               </a:rPr>
               <a:t>كُنْتُ مَرِيضًا، فَذَهَبْتُ إِلَى الطَّبِيبِ.</a:t>
@@ -7503,6 +7549,7 @@
                   <a:srgbClr val="1B3B6F"/>
                 </a:solidFill>
                 <a:latin typeface="Amiri" pitchFamily="2" charset="-78"/>
+                <a:ea typeface="Amiri" pitchFamily="2" charset="-78"/>
                 <a:cs typeface="Amiri" pitchFamily="2" charset="-78"/>
               </a:rPr>
               <a:t>إِذَا نَجَحْتُ، سَأُسَافِرُ إِلَى البَحْرِ.</a:t>
@@ -7664,6 +7711,7 @@
                   <a:srgbClr val="1F2A37"/>
                 </a:solidFill>
                 <a:latin typeface="Amiri" pitchFamily="2" charset="-78"/>
+                <a:ea typeface="Amiri" pitchFamily="2" charset="-78"/>
                 <a:cs typeface="Amiri" pitchFamily="2" charset="-78"/>
               </a:rPr>
               <a:t>أ</a:t>
@@ -7690,6 +7738,7 @@
                   <a:srgbClr val="1F2A37"/>
                 </a:solidFill>
                 <a:latin typeface="Amiri" pitchFamily="2" charset="-78"/>
+                <a:ea typeface="Amiri" pitchFamily="2" charset="-78"/>
                 <a:cs typeface="Amiri" pitchFamily="2" charset="-78"/>
               </a:rPr>
               <a:t>ب</a:t>
@@ -7836,6 +7885,7 @@
                   <a:srgbClr val="D4AF37"/>
                 </a:solidFill>
                 <a:latin typeface="Amiri" pitchFamily="2" charset="-78"/>
+                <a:ea typeface="Amiri" pitchFamily="2" charset="-78"/>
                 <a:cs typeface="Amiri" pitchFamily="2" charset="-78"/>
               </a:rPr>
               <a:t>م</a:t>
@@ -8093,6 +8143,7 @@
                   <a:srgbClr val="8A6D1E"/>
                 </a:solidFill>
                 <a:latin typeface="Amiri" pitchFamily="2" charset="-78"/>
+                <a:ea typeface="Amiri" pitchFamily="2" charset="-78"/>
                 <a:cs typeface="Amiri" pitchFamily="2" charset="-78"/>
               </a:rPr>
               <a:t>أ</a:t>
@@ -8157,6 +8208,7 @@
                   <a:srgbClr val="1B3B6F"/>
                 </a:solidFill>
                 <a:latin typeface="Amiri" pitchFamily="2" charset="-78"/>
+                <a:ea typeface="Amiri" pitchFamily="2" charset="-78"/>
                 <a:cs typeface="Amiri" pitchFamily="2" charset="-78"/>
               </a:rPr>
               <a:t>أ</a:t>
@@ -8208,6 +8260,7 @@
                   <a:srgbClr val="8A6D1E"/>
                 </a:solidFill>
                 <a:latin typeface="Amiri" pitchFamily="2" charset="-78"/>
+                <a:ea typeface="Amiri" pitchFamily="2" charset="-78"/>
                 <a:cs typeface="Amiri" pitchFamily="2" charset="-78"/>
               </a:rPr>
               <a:t>نَمُوذَجُ الإِجَابَةِ</a:t>
@@ -8321,6 +8374,7 @@
                   <a:srgbClr val="1F2A37"/>
                 </a:solidFill>
                 <a:latin typeface="Amiri" pitchFamily="2" charset="-78"/>
+                <a:ea typeface="Amiri" pitchFamily="2" charset="-78"/>
                 <a:cs typeface="Amiri" pitchFamily="2" charset="-78"/>
               </a:rPr>
               <a:t>يَوْمِي المِثَالِيُّ يَكُونُ يَوْمَ الجُمُعَةِ. أَسْتَيْقِظُ فِي السَّاعَةِ الثَّامِنَةِ، لِأَنِّي لَا أَذْهَبُ إِلَى المَدْرَسَةِ. آكُلُ فُطُورًا كَبِيرًا مَعَ أُسْرَتِي: الفُولَ وَالبَيْضَ وَالخُبْزَ، وَأَشْرَبُ الشَّايَ. نَتَحَدَّثُ كَثِيرًا، لِأَنَّنَا لَا نَجْلِسُ مَعًا فِي الصَّبَاحِ أَيَّامَ المَدْرَسَةِ.</a:t>
@@ -8340,6 +8394,7 @@
                   <a:srgbClr val="1F2A37"/>
                 </a:solidFill>
                 <a:latin typeface="Amiri" pitchFamily="2" charset="-78"/>
+                <a:ea typeface="Amiri" pitchFamily="2" charset="-78"/>
                 <a:cs typeface="Amiri" pitchFamily="2" charset="-78"/>
               </a:rPr>
               <a:t>بَعْدَ ذٰلِكَ أَذْهَبُ إِلَى النَّادِي بِالدَّرَّاجَةِ، وَأَلْعَبُ كُرَةَ القَدَمِ سَاعَتَيْنِ. الرِّيَاضَةُ مُهِمَّةٌ لِلصِّحَّةِ، وَهِيَ تَجْعَلُنِي سَعِيدًا. فِي الظُّهْرِ نَأْكُلُ الغَدَاءَ فِي بَيْتِ جَدِّي، وَتَطْبُخُ جَدَّتِي المَقْلُوبَةَ اللَّذِيذَةَ.</a:t>
@@ -8359,6 +8414,7 @@
                   <a:srgbClr val="1F2A37"/>
                 </a:solidFill>
                 <a:latin typeface="Amiri" pitchFamily="2" charset="-78"/>
+                <a:ea typeface="Amiri" pitchFamily="2" charset="-78"/>
                 <a:cs typeface="Amiri" pitchFamily="2" charset="-78"/>
               </a:rPr>
               <a:t>فِي الجُمُعَةِ المَاضِيَةِ كَانَ يَوْمِي مُخْتَلِفًا. كُنْتُ مَرِيضًا، وَكَانَ عِنْدِي صُدَاعٌ وَحُمَّى. ذَهَبْتُ إِلَى الطَّبِيبِ، وَقَالَ: «يَجِبُ أَنْ تَرْتَاحَ». بَقِيتُ فِي السَّرِيرِ يَوْمَيْنِ، وَشَاهَدْتُ التِّلْفَازَ، وَشَرِبْتُ الشَّايَ بِالعَسَلِ. كَانَ يَوْمًا مُمِلًّا جِدًّا!</a:t>
@@ -8378,6 +8434,7 @@
                   <a:srgbClr val="1F2A37"/>
                 </a:solidFill>
                 <a:latin typeface="Amiri" pitchFamily="2" charset="-78"/>
+                <a:ea typeface="Amiri" pitchFamily="2" charset="-78"/>
                 <a:cs typeface="Amiri" pitchFamily="2" charset="-78"/>
               </a:rPr>
               <a:t>فِي رَأْيِي، اليَوْمُ المِثَالِيُّ فِيهِ أُسْرَةٌ وَرِيَاضَةٌ وَأَكْلٌ لَذِيذٌ. فِي المُسْتَقْبَلِ، إِذَا سَافَرْتُ إِلَى بَلَدٍ آخَرَ، سَأَزُورُ مَطَاعِمَهُ وَمَتَاحِفَهُ فِي يَوْمٍ وَاحِدٍ!</a:t>
@@ -8541,11 +8598,12 @@
               <a:buNone/>
             </a:pPr>
             <a:r>
-              <a:rPr lang="en-US" sz="950" b="1" dirty="0">
+              <a:rPr lang="ar-SA" sz="950" b="1" dirty="0">
                 <a:solidFill>
                   <a:srgbClr val="FFFFFF"/>
                 </a:solidFill>
                 <a:latin typeface="Calibri" pitchFamily="34" charset="0"/>
+                <a:ea typeface="Amiri" pitchFamily="2" charset="-78"/>
                 <a:cs typeface="Amiri" pitchFamily="2" charset="-78"/>
               </a:rPr>
               <a:t>أَسْتَيْقِظُ فِي السَّاعَةِ الثَّامِنَةِ</a:t>
@@ -8606,11 +8664,12 @@
               <a:buNone/>
             </a:pPr>
             <a:r>
-              <a:rPr lang="en-US" sz="950" b="1" dirty="0">
+              <a:rPr lang="ar-SA" sz="950" b="1" dirty="0">
                 <a:solidFill>
                   <a:srgbClr val="FFFFFF"/>
                 </a:solidFill>
                 <a:latin typeface="Calibri" pitchFamily="34" charset="0"/>
+                <a:ea typeface="Amiri" pitchFamily="2" charset="-78"/>
                 <a:cs typeface="Amiri" pitchFamily="2" charset="-78"/>
               </a:rPr>
               <a:t>بِالدَّرَّاجَةِ</a:t>
@@ -8671,11 +8730,12 @@
               <a:buNone/>
             </a:pPr>
             <a:r>
-              <a:rPr lang="en-US" sz="950" b="1" dirty="0">
+              <a:rPr lang="ar-SA" sz="950" b="1" dirty="0">
                 <a:solidFill>
                   <a:srgbClr val="FFFFFF"/>
                 </a:solidFill>
                 <a:latin typeface="Calibri" pitchFamily="34" charset="0"/>
+                <a:ea typeface="Amiri" pitchFamily="2" charset="-78"/>
                 <a:cs typeface="Amiri" pitchFamily="2" charset="-78"/>
               </a:rPr>
               <a:t>كَانَ عِنْدِي صُدَاعٌ</a:t>
@@ -8736,11 +8796,12 @@
               <a:buNone/>
             </a:pPr>
             <a:r>
-              <a:rPr lang="en-US" sz="950" b="1" dirty="0">
+              <a:rPr lang="ar-SA" sz="950" b="1" dirty="0">
                 <a:solidFill>
                   <a:srgbClr val="FFFFFF"/>
                 </a:solidFill>
                 <a:latin typeface="Calibri" pitchFamily="34" charset="0"/>
+                <a:ea typeface="Amiri" pitchFamily="2" charset="-78"/>
                 <a:cs typeface="Amiri" pitchFamily="2" charset="-78"/>
               </a:rPr>
               <a:t>إِذَا سَافَرْتُ … سَأَزُورُ</a:t>
@@ -8874,6 +8935,7 @@
                   <a:srgbClr val="D4AF37"/>
                 </a:solidFill>
                 <a:latin typeface="Amiri" pitchFamily="2" charset="-78"/>
+                <a:ea typeface="Amiri" pitchFamily="2" charset="-78"/>
                 <a:cs typeface="Amiri" pitchFamily="2" charset="-78"/>
               </a:rPr>
               <a:t>م</a:t>
@@ -9131,6 +9193,7 @@
                   <a:srgbClr val="8A6D1E"/>
                 </a:solidFill>
                 <a:latin typeface="Amiri" pitchFamily="2" charset="-78"/>
+                <a:ea typeface="Amiri" pitchFamily="2" charset="-78"/>
                 <a:cs typeface="Amiri" pitchFamily="2" charset="-78"/>
               </a:rPr>
               <a:t>أ</a:t>
@@ -9195,6 +9258,7 @@
                   <a:srgbClr val="1B3B6F"/>
                 </a:solidFill>
                 <a:latin typeface="Amiri" pitchFamily="2" charset="-78"/>
+                <a:ea typeface="Amiri" pitchFamily="2" charset="-78"/>
                 <a:cs typeface="Amiri" pitchFamily="2" charset="-78"/>
               </a:rPr>
               <a:t>أ</a:t>
@@ -9246,6 +9310,7 @@
                   <a:srgbClr val="8A6D1E"/>
                 </a:solidFill>
                 <a:latin typeface="Amiri" pitchFamily="2" charset="-78"/>
+                <a:ea typeface="Amiri" pitchFamily="2" charset="-78"/>
                 <a:cs typeface="Amiri" pitchFamily="2" charset="-78"/>
               </a:rPr>
               <a:t>نَمُوذَجُ الإِجَابَةِ</a:t>
@@ -9359,6 +9424,7 @@
                   <a:srgbClr val="1F2A37"/>
                 </a:solidFill>
                 <a:latin typeface="Amiri" pitchFamily="2" charset="-78"/>
+                <a:ea typeface="Amiri" pitchFamily="2" charset="-78"/>
                 <a:cs typeface="Amiri" pitchFamily="2" charset="-78"/>
               </a:rPr>
               <a:t>لَوْ سَأَلَنِي أَحَدٌ عَنْ يَوْمِي المِثَالِيِّ، لَقُلْتُ إِنَّهُ يَوْمٌ بَسِيطٌ، لٰكِنَّهُ مُتَوَازِنٌ. أَسْتَيْقِظُ فِيهِ مَعَ شُرُوقِ الشَّمْسِ دُونَ مُنَبِّهٍ، وَأَمْشِي نِصْفَ سَاعَةٍ فِي الحَدِيقَةِ، ثُمَّ أَتَنَاوَلُ فُطُورًا صِحِّيًّا مِنَ الشُّوفَانِ وَالفَوَاكِهِ مَعَ أُسْرَتِي.</a:t>
@@ -9378,6 +9444,7 @@
                   <a:srgbClr val="1F2A37"/>
                 </a:solidFill>
                 <a:latin typeface="Amiri" pitchFamily="2" charset="-78"/>
+                <a:ea typeface="Amiri" pitchFamily="2" charset="-78"/>
                 <a:cs typeface="Amiri" pitchFamily="2" charset="-78"/>
               </a:rPr>
               <a:t>فِي الظُّهْرِ أَرْكَبُ القِطَارَ إِلَى وَسَطِ المَدِينَةِ، لِأَنَّهُ أَسْرَعُ مِنَ الحَافِلَةِ وَأَقَلُّ تَلْوِيثًا مِنَ السَّيَّارَةِ، وَأَلْتَقِي بِأَصْدِقَائِي فِي مَقْهًى صَغِيرٍ يُقَدِّمُ أَلَذَّ عَصِيرٍ فِي المَدِينَةِ. أَمَّا المَسَاءُ فَأَقْضِيهِ فِي قِرَاءَةِ كِتَابٍ جَيِّدٍ، ثُمَّ أَنَامُ فِي العَاشِرَةِ لِكَيْ أَسْتَيْقِظَ نَشِيطًا.</a:t>
@@ -9397,6 +9464,7 @@
                   <a:srgbClr val="1F2A37"/>
                 </a:solidFill>
                 <a:latin typeface="Amiri" pitchFamily="2" charset="-78"/>
+                <a:ea typeface="Amiri" pitchFamily="2" charset="-78"/>
                 <a:cs typeface="Amiri" pitchFamily="2" charset="-78"/>
               </a:rPr>
               <a:t>فِي الحَقِيقَةِ، لَمْ تَكُنْ أَيَّامِي هٰكَذَا دَائِمًا؛ فَفِي السَّنَةِ المَاضِيَةِ كُنْتُ أَسْهَرُ عَلَى الهَاتِفِ، وَآكُلُ الوَجَبَاتِ السَّرِيعَةَ، حَتَّى نَصَحَنِي الطَّبِيبُ بِأَنْ أُغَيِّرَ عَادَاتِي بَعْدَ صُدَاعٍ اسْتَمَرَّ أُسْبُوعَيْنِ، فَبَدَأْتُ أُغَيِّرُهَا خُطْوَةً خُطْوَةً.</a:t>
@@ -9416,6 +9484,7 @@
                   <a:srgbClr val="1F2A37"/>
                 </a:solidFill>
                 <a:latin typeface="Amiri" pitchFamily="2" charset="-78"/>
+                <a:ea typeface="Amiri" pitchFamily="2" charset="-78"/>
                 <a:cs typeface="Amiri" pitchFamily="2" charset="-78"/>
               </a:rPr>
               <a:t>صَحِيحٌ أَنَّ هٰذَا اليَوْمَ لَا يَتَكَرَّرُ كُلَّ أُسْبُوعٍ، غَيْرَ أَنِّي أُحَاوِلُ أَنْ أَعِيشَ جُزْءًا مِنْهُ كُلَّ يَوْمٍ. وَإِذَا نَجَحْتُ فِي امْتِحَانَاتِي، سَأُكَافِئُ نَفْسِي بِيَوْمٍ مِثَالِيٍّ كَامِلٍ عَلَى شَاطِئِ البَحْرِ.</a:t>
@@ -9514,11 +9583,12 @@
               <a:buNone/>
             </a:pPr>
             <a:r>
-              <a:rPr lang="en-US" sz="950" b="1" dirty="0">
+              <a:rPr lang="ar-SA" sz="950" b="1" dirty="0">
                 <a:solidFill>
                   <a:srgbClr val="FFFFFF"/>
                 </a:solidFill>
                 <a:latin typeface="Calibri" pitchFamily="34" charset="0"/>
+                <a:ea typeface="Amiri" pitchFamily="2" charset="-78"/>
                 <a:cs typeface="Amiri" pitchFamily="2" charset="-78"/>
               </a:rPr>
               <a:t>لَوْ سَأَلَنِي … لَقُلْتُ</a:t>
@@ -9579,11 +9649,12 @@
               <a:buNone/>
             </a:pPr>
             <a:r>
-              <a:rPr lang="en-US" sz="950" b="1" dirty="0">
+              <a:rPr lang="ar-SA" sz="950" b="1" dirty="0">
                 <a:solidFill>
                   <a:srgbClr val="FFFFFF"/>
                 </a:solidFill>
                 <a:latin typeface="Calibri" pitchFamily="34" charset="0"/>
+                <a:ea typeface="Amiri" pitchFamily="2" charset="-78"/>
                 <a:cs typeface="Amiri" pitchFamily="2" charset="-78"/>
               </a:rPr>
               <a:t>أَسْرَعُ مِنَ الحَافِلَةِ وَأَقَلُّ تَلْوِيثًا</a:t>
@@ -9644,11 +9715,12 @@
               <a:buNone/>
             </a:pPr>
             <a:r>
-              <a:rPr lang="en-US" sz="950" b="1" dirty="0">
+              <a:rPr lang="ar-SA" sz="950" b="1" dirty="0">
                 <a:solidFill>
                   <a:srgbClr val="FFFFFF"/>
                 </a:solidFill>
                 <a:latin typeface="Calibri" pitchFamily="34" charset="0"/>
+                <a:ea typeface="Amiri" pitchFamily="2" charset="-78"/>
                 <a:cs typeface="Amiri" pitchFamily="2" charset="-78"/>
               </a:rPr>
               <a:t>نَصَحَنِي الطَّبِيبُ بِأَنْ</a:t>
@@ -9709,11 +9781,12 @@
               <a:buNone/>
             </a:pPr>
             <a:r>
-              <a:rPr lang="en-US" sz="950" b="1" dirty="0">
+              <a:rPr lang="ar-SA" sz="950" b="1" dirty="0">
                 <a:solidFill>
                   <a:srgbClr val="FFFFFF"/>
                 </a:solidFill>
                 <a:latin typeface="Calibri" pitchFamily="34" charset="0"/>
+                <a:ea typeface="Amiri" pitchFamily="2" charset="-78"/>
                 <a:cs typeface="Amiri" pitchFamily="2" charset="-78"/>
               </a:rPr>
               <a:t>إِذَا نَجَحْتُ … سَأُكَافِئُ</a:t>
@@ -9847,6 +9920,7 @@
                   <a:srgbClr val="D4AF37"/>
                 </a:solidFill>
                 <a:latin typeface="Amiri" pitchFamily="2" charset="-78"/>
+                <a:ea typeface="Amiri" pitchFamily="2" charset="-78"/>
                 <a:cs typeface="Amiri" pitchFamily="2" charset="-78"/>
               </a:rPr>
               <a:t>م</a:t>
@@ -10104,6 +10178,7 @@
                   <a:srgbClr val="8A6D1E"/>
                 </a:solidFill>
                 <a:latin typeface="Amiri" pitchFamily="2" charset="-78"/>
+                <a:ea typeface="Amiri" pitchFamily="2" charset="-78"/>
                 <a:cs typeface="Amiri" pitchFamily="2" charset="-78"/>
               </a:rPr>
               <a:t>ب</a:t>
@@ -10168,6 +10243,7 @@
                   <a:srgbClr val="1B3B6F"/>
                 </a:solidFill>
                 <a:latin typeface="Amiri" pitchFamily="2" charset="-78"/>
+                <a:ea typeface="Amiri" pitchFamily="2" charset="-78"/>
                 <a:cs typeface="Amiri" pitchFamily="2" charset="-78"/>
               </a:rPr>
               <a:t>ب</a:t>
@@ -10219,6 +10295,7 @@
                   <a:srgbClr val="8A6D1E"/>
                 </a:solidFill>
                 <a:latin typeface="Amiri" pitchFamily="2" charset="-78"/>
+                <a:ea typeface="Amiri" pitchFamily="2" charset="-78"/>
                 <a:cs typeface="Amiri" pitchFamily="2" charset="-78"/>
               </a:rPr>
               <a:t>نَمُوذَجُ الإِجَابَةِ</a:t>
@@ -10332,6 +10409,7 @@
                   <a:srgbClr val="1F2A37"/>
                 </a:solidFill>
                 <a:latin typeface="Amiri" pitchFamily="2" charset="-78"/>
+                <a:ea typeface="Amiri" pitchFamily="2" charset="-78"/>
                 <a:cs typeface="Amiri" pitchFamily="2" charset="-78"/>
               </a:rPr>
               <a:t>يَعْتَقِدُ كَثِيرٌ مِنَ النَّاسِ أَنَّ الحَيَاةَ العَصْرِيَّةَ أَسْهَلُ مِنْ حَيَاةِ أَجْدَادِنَا، وَهٰذَا صَحِيحٌ إِلَى حَدٍّ كَبِيرٍ؛ فَالمُوَاصَلَاتُ أَسْرَعُ، وَالطِّبُّ أَفْضَلُ، وَالطَّعَامُ مُتَوَفِّرٌ فِي كُلِّ وَقْتٍ، وَنَسْتَطِيعُ أَنْ نُسَافِرَ إِلَى أَيِّ بَلَدٍ فِي سَاعَاتٍ قَلِيلَةٍ. غَيْرَ أَنَّ السُّهُولَةَ لَا تَعْنِي دَائِمًا الصِّحَّةَ.</a:t>
@@ -10351,6 +10429,7 @@
                   <a:srgbClr val="1F2A37"/>
                 </a:solidFill>
                 <a:latin typeface="Amiri" pitchFamily="2" charset="-78"/>
+                <a:ea typeface="Amiri" pitchFamily="2" charset="-78"/>
                 <a:cs typeface="Amiri" pitchFamily="2" charset="-78"/>
               </a:rPr>
               <a:t>فِي المَاضِي كَانَ النَّاسُ يَمْشُونَ كَثِيرًا، وَيَأْكُلُونَ مَا يَزْرَعُونَهُ، وَيَنَامُونَ بَعْدَ المَغْرِبِ بِقَلِيلٍ، أَمَّا اليَوْمَ فَنَجْلِسُ سَاعَاتٍ أَمَامَ الشَّاشَاتِ، وَنَطْلُبُ الوَجَبَاتِ السَّرِيعَةَ بِضَغْطَةِ زِرٍّ، وَنَسْهَرُ حَتَّى مُنْتَصَفِ اللَّيْلِ.</a:t>
@@ -10370,6 +10449,7 @@
                   <a:srgbClr val="1F2A37"/>
                 </a:solidFill>
                 <a:latin typeface="Amiri" pitchFamily="2" charset="-78"/>
+                <a:ea typeface="Amiri" pitchFamily="2" charset="-78"/>
                 <a:cs typeface="Amiri" pitchFamily="2" charset="-78"/>
               </a:rPr>
               <a:t>لَاحَظْتُ ذٰلِكَ فِي أُسْرَتِي؛ فَقَبْلَ سَنَتَيْنِ كَانَ أَبِي يَذْهَبُ إِلَى عَمَلِهِ بِالسَّيَّارَةِ، وَيَشْكُو مِنْ أَلَمٍ فِي ظَهْرِهِ، فَنَصَحَهُ الطَّبِيبُ بِأَنْ يَمْشِيَ. فَصَارَ يَمْشِي إِلَى المَحَطَّةِ كُلَّ صَبَاحٍ، وَخَفَّ الأَلَمُ خِلَالَ شَهْرٍ، وَأَصْبَحَ يَنَامُ أَفْضَلَ مِنْ قَبْلُ.</a:t>
@@ -10389,6 +10469,7 @@
                   <a:srgbClr val="1F2A37"/>
                 </a:solidFill>
                 <a:latin typeface="Amiri" pitchFamily="2" charset="-78"/>
+                <a:ea typeface="Amiri" pitchFamily="2" charset="-78"/>
                 <a:cs typeface="Amiri" pitchFamily="2" charset="-78"/>
               </a:rPr>
               <a:t>فِي رَأْيِي، لَا يَجِبُ أَنْ نَرْفُضَ الحَيَاةَ العَصْرِيَّةَ، بَلْ أَنْ نَسْتَعْمِلَهَا بِحِكْمَةٍ. وَلَوْ أَخَذْنَا مِنَ المَاضِي عَادَاتِهِ الصِّحِّيَّةَ، وَمِنَ الحَاضِرِ تِكْنُولُوجْيَاهُ المُفِيدَةَ، لَعِشْنَا أَفْضَلَ حَيَاةٍ مُمْكِنَةٍ.</a:t>
@@ -10487,11 +10568,12 @@
               <a:buNone/>
             </a:pPr>
             <a:r>
-              <a:rPr lang="en-US" sz="950" b="1" dirty="0">
+              <a:rPr lang="ar-SA" sz="950" b="1" dirty="0">
                 <a:solidFill>
                   <a:srgbClr val="FFFFFF"/>
                 </a:solidFill>
                 <a:latin typeface="Calibri" pitchFamily="34" charset="0"/>
+                <a:ea typeface="Amiri" pitchFamily="2" charset="-78"/>
                 <a:cs typeface="Amiri" pitchFamily="2" charset="-78"/>
               </a:rPr>
               <a:t>أَسْهَلُ مِنْ حَيَاةِ أَجْدَادِنَا</a:t>
@@ -10552,11 +10634,12 @@
               <a:buNone/>
             </a:pPr>
             <a:r>
-              <a:rPr lang="en-US" sz="950" b="1" dirty="0">
+              <a:rPr lang="ar-SA" sz="950" b="1" dirty="0">
                 <a:solidFill>
                   <a:srgbClr val="FFFFFF"/>
                 </a:solidFill>
                 <a:latin typeface="Calibri" pitchFamily="34" charset="0"/>
+                <a:ea typeface="Amiri" pitchFamily="2" charset="-78"/>
                 <a:cs typeface="Amiri" pitchFamily="2" charset="-78"/>
               </a:rPr>
               <a:t>أَمَّا اليَوْمَ فَنَجْلِسُ</a:t>
@@ -10617,11 +10700,12 @@
               <a:buNone/>
             </a:pPr>
             <a:r>
-              <a:rPr lang="en-US" sz="950" b="1" dirty="0">
+              <a:rPr lang="ar-SA" sz="950" b="1" dirty="0">
                 <a:solidFill>
                   <a:srgbClr val="FFFFFF"/>
                 </a:solidFill>
                 <a:latin typeface="Calibri" pitchFamily="34" charset="0"/>
+                <a:ea typeface="Amiri" pitchFamily="2" charset="-78"/>
                 <a:cs typeface="Amiri" pitchFamily="2" charset="-78"/>
               </a:rPr>
               <a:t>نَصَحَهُ الطَّبِيبُ بِأَنْ يَمْشِيَ</a:t>
@@ -10682,11 +10766,12 @@
               <a:buNone/>
             </a:pPr>
             <a:r>
-              <a:rPr lang="en-US" sz="950" b="1" dirty="0">
+              <a:rPr lang="ar-SA" sz="950" b="1" dirty="0">
                 <a:solidFill>
                   <a:srgbClr val="FFFFFF"/>
                 </a:solidFill>
                 <a:latin typeface="Calibri" pitchFamily="34" charset="0"/>
+                <a:ea typeface="Amiri" pitchFamily="2" charset="-78"/>
                 <a:cs typeface="Amiri" pitchFamily="2" charset="-78"/>
               </a:rPr>
               <a:t>لَوْ أَخَذْنَا … لَعِشْنَا</a:t>
@@ -10820,6 +10905,7 @@
                   <a:srgbClr val="D4AF37"/>
                 </a:solidFill>
                 <a:latin typeface="Amiri" pitchFamily="2" charset="-78"/>
+                <a:ea typeface="Amiri" pitchFamily="2" charset="-78"/>
                 <a:cs typeface="Amiri" pitchFamily="2" charset="-78"/>
               </a:rPr>
               <a:t>م</a:t>
@@ -11140,6 +11226,7 @@
                   <a:srgbClr val="8A6D1E"/>
                 </a:solidFill>
                 <a:latin typeface="Amiri" pitchFamily="2" charset="-78"/>
+                <a:ea typeface="Amiri" pitchFamily="2" charset="-78"/>
                 <a:cs typeface="Amiri" pitchFamily="2" charset="-78"/>
               </a:rPr>
               <a:t>قَيِّمْ عَمَلَكَ</a:t>
@@ -12384,6 +12471,7 @@
                   <a:srgbClr val="FFFFFF"/>
                 </a:solidFill>
                 <a:latin typeface="Amiri" pitchFamily="2" charset="-78"/>
+                <a:ea typeface="Amiri" pitchFamily="2" charset="-78"/>
                 <a:cs typeface="Amiri" pitchFamily="2" charset="-78"/>
               </a:rPr>
               <a:t>أَحْسَنْتُمْ! إِلَى اللِّقَاءِ</a:t>
@@ -12536,6 +12624,7 @@
                   <a:srgbClr val="D4AF37"/>
                 </a:solidFill>
                 <a:latin typeface="Amiri" pitchFamily="2" charset="-78"/>
+                <a:ea typeface="Amiri" pitchFamily="2" charset="-78"/>
                 <a:cs typeface="Amiri" pitchFamily="2" charset="-78"/>
               </a:rPr>
               <a:t>المِحْوَرُ التَّالِي</a:t>
@@ -12669,6 +12758,7 @@
                   <a:srgbClr val="D4AF37"/>
                 </a:solidFill>
                 <a:latin typeface="Amiri" pitchFamily="2" charset="-78"/>
+                <a:ea typeface="Amiri" pitchFamily="2" charset="-78"/>
                 <a:cs typeface="Amiri" pitchFamily="2" charset="-78"/>
               </a:rPr>
               <a:t>م</a:t>
@@ -12989,6 +13079,7 @@
                   <a:srgbClr val="8A6D1E"/>
                 </a:solidFill>
                 <a:latin typeface="Amiri" pitchFamily="2" charset="-78"/>
+                <a:ea typeface="Amiri" pitchFamily="2" charset="-78"/>
                 <a:cs typeface="Amiri" pitchFamily="2" charset="-78"/>
               </a:rPr>
               <a:t>آدَابُ الصَّفِّ</a:t>
@@ -14520,6 +14611,7 @@
                   <a:srgbClr val="D4AF37"/>
                 </a:solidFill>
                 <a:latin typeface="Amiri" pitchFamily="2" charset="-78"/>
+                <a:ea typeface="Amiri" pitchFamily="2" charset="-78"/>
                 <a:cs typeface="Amiri" pitchFamily="2" charset="-78"/>
               </a:rPr>
               <a:t>م</a:t>
@@ -14840,6 +14932,7 @@
                   <a:srgbClr val="8A6D1E"/>
                 </a:solidFill>
                 <a:latin typeface="Amiri" pitchFamily="2" charset="-78"/>
+                <a:ea typeface="Amiri" pitchFamily="2" charset="-78"/>
                 <a:cs typeface="Amiri" pitchFamily="2" charset="-78"/>
               </a:rPr>
               <a:t>خَرِيطَةُ الوَرْشَةِ</a:t>
@@ -15154,6 +15247,7 @@
                   <a:srgbClr val="1B3B6F"/>
                 </a:solidFill>
                 <a:latin typeface="Amiri" pitchFamily="2" charset="-78"/>
+                <a:ea typeface="Amiri" pitchFamily="2" charset="-78"/>
                 <a:cs typeface="Amiri" pitchFamily="2" charset="-78"/>
               </a:rPr>
               <a:t>كَيْفَ</a:t>
@@ -15430,6 +15524,7 @@
                   <a:srgbClr val="1E6B52"/>
                 </a:solidFill>
                 <a:latin typeface="Amiri" pitchFamily="2" charset="-78"/>
+                <a:ea typeface="Amiri" pitchFamily="2" charset="-78"/>
                 <a:cs typeface="Amiri" pitchFamily="2" charset="-78"/>
               </a:rPr>
               <a:t>الاسْتِمَارَةُ</a:t>
@@ -15706,6 +15801,7 @@
                   <a:srgbClr val="1E6B52"/>
                 </a:solidFill>
                 <a:latin typeface="Amiri" pitchFamily="2" charset="-78"/>
+                <a:ea typeface="Amiri" pitchFamily="2" charset="-78"/>
                 <a:cs typeface="Amiri" pitchFamily="2" charset="-78"/>
               </a:rPr>
               <a:t>الرِّسَالَةُ</a:t>
@@ -15982,6 +16078,7 @@
                   <a:srgbClr val="1E6B52"/>
                 </a:solidFill>
                 <a:latin typeface="Amiri" pitchFamily="2" charset="-78"/>
+                <a:ea typeface="Amiri" pitchFamily="2" charset="-78"/>
                 <a:cs typeface="Amiri" pitchFamily="2" charset="-78"/>
               </a:rPr>
               <a:t>المَقَالُ</a:t>
@@ -16258,6 +16355,7 @@
                   <a:srgbClr val="8A6D1E"/>
                 </a:solidFill>
                 <a:latin typeface="Amiri" pitchFamily="2" charset="-78"/>
+                <a:ea typeface="Amiri" pitchFamily="2" charset="-78"/>
                 <a:cs typeface="Amiri" pitchFamily="2" charset="-78"/>
               </a:rPr>
               <a:t>قَيِّمْ</a:t>
@@ -16501,6 +16599,7 @@
                   <a:srgbClr val="D4AF37"/>
                 </a:solidFill>
                 <a:latin typeface="Amiri" pitchFamily="2" charset="-78"/>
+                <a:ea typeface="Amiri" pitchFamily="2" charset="-78"/>
                 <a:cs typeface="Amiri" pitchFamily="2" charset="-78"/>
               </a:rPr>
               <a:t>م</a:t>
@@ -16821,6 +16920,7 @@
                   <a:srgbClr val="8A6D1E"/>
                 </a:solidFill>
                 <a:latin typeface="Amiri" pitchFamily="2" charset="-78"/>
+                <a:ea typeface="Amiri" pitchFamily="2" charset="-78"/>
                 <a:cs typeface="Amiri" pitchFamily="2" charset="-78"/>
               </a:rPr>
               <a:t>امْتِحَانُ الكِتَابَةِ</a:t>
@@ -17445,6 +17545,7 @@
                   <a:srgbClr val="1B3B6F"/>
                 </a:solidFill>
                 <a:latin typeface="Amiri" pitchFamily="2" charset="-78"/>
+                <a:ea typeface="Amiri" pitchFamily="2" charset="-78"/>
                 <a:cs typeface="Amiri" pitchFamily="2" charset="-78"/>
               </a:rPr>
               <a:t>أَسْتَيْقِظُ عَادَةً فِي السَّابِعَةِ</a:t>
@@ -17544,6 +17645,7 @@
                   <a:srgbClr val="1B3B6F"/>
                 </a:solidFill>
                 <a:latin typeface="Amiri" pitchFamily="2" charset="-78"/>
+                <a:ea typeface="Amiri" pitchFamily="2" charset="-78"/>
                 <a:cs typeface="Amiri" pitchFamily="2" charset="-78"/>
               </a:rPr>
               <a:t>نَصَحَنِي الطَّبِيبُ بِأَنْ أُغَيِّرَ عَادَاتِي</a:t>
@@ -17643,6 +17745,7 @@
                   <a:srgbClr val="1B3B6F"/>
                 </a:solidFill>
                 <a:latin typeface="Amiri" pitchFamily="2" charset="-78"/>
+                <a:ea typeface="Amiri" pitchFamily="2" charset="-78"/>
                 <a:cs typeface="Amiri" pitchFamily="2" charset="-78"/>
               </a:rPr>
               <a:t>إِذَا نَجَحْتُ، سَأُكَافِئُ نَفْسِي …</a:t>
@@ -17814,6 +17917,7 @@
                   <a:srgbClr val="D4AF37"/>
                 </a:solidFill>
                 <a:latin typeface="Amiri" pitchFamily="2" charset="-78"/>
+                <a:ea typeface="Amiri" pitchFamily="2" charset="-78"/>
                 <a:cs typeface="Amiri" pitchFamily="2" charset="-78"/>
               </a:rPr>
               <a:t>م</a:t>
@@ -18134,6 +18238,7 @@
                   <a:srgbClr val="8A6D1E"/>
                 </a:solidFill>
                 <a:latin typeface="Amiri" pitchFamily="2" charset="-78"/>
+                <a:ea typeface="Amiri" pitchFamily="2" charset="-78"/>
                 <a:cs typeface="Amiri" pitchFamily="2" charset="-78"/>
               </a:rPr>
               <a:t>اسْتِمَارَةُ بَرْنَامَجِ التَّبَادُلِ</a:t>
@@ -18490,6 +18595,7 @@
                   <a:srgbClr val="1B3B6F"/>
                 </a:solidFill>
                 <a:latin typeface="Amiri" pitchFamily="2" charset="-78"/>
+                <a:ea typeface="Amiri" pitchFamily="2" charset="-78"/>
                 <a:cs typeface="Amiri" pitchFamily="2" charset="-78"/>
               </a:rPr>
               <a:t>الاسْمُ وَالعُمْرُ</a:t>
@@ -18734,6 +18840,7 @@
                   <a:srgbClr val="1B3B6F"/>
                 </a:solidFill>
                 <a:latin typeface="Amiri" pitchFamily="2" charset="-78"/>
+                <a:ea typeface="Amiri" pitchFamily="2" charset="-78"/>
                 <a:cs typeface="Amiri" pitchFamily="2" charset="-78"/>
               </a:rPr>
               <a:t>وَقْتُ الاسْتِيقَاظِ عَادَةً</a:t>
@@ -18978,6 +19085,7 @@
                   <a:srgbClr val="1B3B6F"/>
                 </a:solidFill>
                 <a:latin typeface="Amiri" pitchFamily="2" charset="-78"/>
+                <a:ea typeface="Amiri" pitchFamily="2" charset="-78"/>
                 <a:cs typeface="Amiri" pitchFamily="2" charset="-78"/>
               </a:rPr>
               <a:t>طَعَامٌ تُحِبُّهُ</a:t>
@@ -19222,6 +19330,7 @@
                   <a:srgbClr val="1B3B6F"/>
                 </a:solidFill>
                 <a:latin typeface="Amiri" pitchFamily="2" charset="-78"/>
+                <a:ea typeface="Amiri" pitchFamily="2" charset="-78"/>
                 <a:cs typeface="Amiri" pitchFamily="2" charset="-78"/>
               </a:rPr>
               <a:t>طَعَامٌ لَا تَأْكُلُهُ</a:t>
@@ -19466,6 +19575,7 @@
                   <a:srgbClr val="1B3B6F"/>
                 </a:solidFill>
                 <a:latin typeface="Amiri" pitchFamily="2" charset="-78"/>
+                <a:ea typeface="Amiri" pitchFamily="2" charset="-78"/>
                 <a:cs typeface="Amiri" pitchFamily="2" charset="-78"/>
               </a:rPr>
               <a:t>مُشْكِلَةٌ صِحِّيَّةٌ</a:t>
@@ -19710,6 +19820,7 @@
                   <a:srgbClr val="1B3B6F"/>
                 </a:solidFill>
                 <a:latin typeface="Amiri" pitchFamily="2" charset="-78"/>
+                <a:ea typeface="Amiri" pitchFamily="2" charset="-78"/>
                 <a:cs typeface="Amiri" pitchFamily="2" charset="-78"/>
               </a:rPr>
               <a:t>رِيَاضَتُكَ وَكَمْ مَرَّةً</a:t>
@@ -19954,6 +20065,7 @@
                   <a:srgbClr val="1B3B6F"/>
                 </a:solidFill>
                 <a:latin typeface="Amiri" pitchFamily="2" charset="-78"/>
+                <a:ea typeface="Amiri" pitchFamily="2" charset="-78"/>
                 <a:cs typeface="Amiri" pitchFamily="2" charset="-78"/>
               </a:rPr>
               <a:t>كَيْفَ سَتُسَافِرُ؟</a:t>
@@ -20133,6 +20245,7 @@
                   <a:srgbClr val="1B3B6F"/>
                 </a:solidFill>
                 <a:latin typeface="Amiri" pitchFamily="2" charset="-78"/>
+                <a:ea typeface="Amiri" pitchFamily="2" charset="-78"/>
                 <a:cs typeface="Amiri" pitchFamily="2" charset="-78"/>
               </a:rPr>
               <a:t>جُمْلَةٌ: لِمَاذَا تُرِيدُ أَنْ تُشَارِكَ؟</a:t>
@@ -20342,6 +20455,7 @@
                   <a:srgbClr val="D4AF37"/>
                 </a:solidFill>
                 <a:latin typeface="Amiri" pitchFamily="2" charset="-78"/>
+                <a:ea typeface="Amiri" pitchFamily="2" charset="-78"/>
                 <a:cs typeface="Amiri" pitchFamily="2" charset="-78"/>
               </a:rPr>
               <a:t>م</a:t>
@@ -20662,6 +20776,7 @@
                   <a:srgbClr val="8A6D1E"/>
                 </a:solidFill>
                 <a:latin typeface="Amiri" pitchFamily="2" charset="-78"/>
+                <a:ea typeface="Amiri" pitchFamily="2" charset="-78"/>
                 <a:cs typeface="Amiri" pitchFamily="2" charset="-78"/>
               </a:rPr>
               <a:t>نَمُوذَجُ الإِجَابَةِ</a:t>
@@ -20980,6 +21095,7 @@
                   <a:srgbClr val="1B3B6F"/>
                 </a:solidFill>
                 <a:latin typeface="Amiri" pitchFamily="2" charset="-78"/>
+                <a:ea typeface="Amiri" pitchFamily="2" charset="-78"/>
                 <a:cs typeface="Amiri" pitchFamily="2" charset="-78"/>
               </a:rPr>
               <a:t>هَالَةُ سَعِيدٍ، سِتَّ عَشْرَةَ سَنَةً</a:t>
@@ -21018,6 +21134,7 @@
                   <a:srgbClr val="1B3B6F"/>
                 </a:solidFill>
                 <a:latin typeface="Amiri" pitchFamily="2" charset="-78"/>
+                <a:ea typeface="Amiri" pitchFamily="2" charset="-78"/>
                 <a:cs typeface="Amiri" pitchFamily="2" charset="-78"/>
               </a:rPr>
               <a:t>الاسْمُ وَالعُمْرُ</a:t>
@@ -21159,6 +21276,7 @@
                   <a:srgbClr val="1B3B6F"/>
                 </a:solidFill>
                 <a:latin typeface="Amiri" pitchFamily="2" charset="-78"/>
+                <a:ea typeface="Amiri" pitchFamily="2" charset="-78"/>
                 <a:cs typeface="Amiri" pitchFamily="2" charset="-78"/>
               </a:rPr>
               <a:t>السَّابِعَةُ صَبَاحًا</a:t>
@@ -21197,6 +21315,7 @@
                   <a:srgbClr val="1B3B6F"/>
                 </a:solidFill>
                 <a:latin typeface="Amiri" pitchFamily="2" charset="-78"/>
+                <a:ea typeface="Amiri" pitchFamily="2" charset="-78"/>
                 <a:cs typeface="Amiri" pitchFamily="2" charset="-78"/>
               </a:rPr>
               <a:t>وَقْتُ الاسْتِيقَاظِ عَادَةً</a:t>
@@ -21338,6 +21457,7 @@
                   <a:srgbClr val="1B3B6F"/>
                 </a:solidFill>
                 <a:latin typeface="Amiri" pitchFamily="2" charset="-78"/>
+                <a:ea typeface="Amiri" pitchFamily="2" charset="-78"/>
                 <a:cs typeface="Amiri" pitchFamily="2" charset="-78"/>
               </a:rPr>
               <a:t>المَقْلُوبَةُ</a:t>
@@ -21376,6 +21496,7 @@
                   <a:srgbClr val="1B3B6F"/>
                 </a:solidFill>
                 <a:latin typeface="Amiri" pitchFamily="2" charset="-78"/>
+                <a:ea typeface="Amiri" pitchFamily="2" charset="-78"/>
                 <a:cs typeface="Amiri" pitchFamily="2" charset="-78"/>
               </a:rPr>
               <a:t>طَعَامٌ تُحِبُّهُ</a:t>
@@ -21517,6 +21638,7 @@
                   <a:srgbClr val="1B3B6F"/>
                 </a:solidFill>
                 <a:latin typeface="Amiri" pitchFamily="2" charset="-78"/>
+                <a:ea typeface="Amiri" pitchFamily="2" charset="-78"/>
                 <a:cs typeface="Amiri" pitchFamily="2" charset="-78"/>
               </a:rPr>
               <a:t>الفُولُ السُّودَانِيُّ</a:t>
@@ -21555,6 +21677,7 @@
                   <a:srgbClr val="1B3B6F"/>
                 </a:solidFill>
                 <a:latin typeface="Amiri" pitchFamily="2" charset="-78"/>
+                <a:ea typeface="Amiri" pitchFamily="2" charset="-78"/>
                 <a:cs typeface="Amiri" pitchFamily="2" charset="-78"/>
               </a:rPr>
               <a:t>طَعَامٌ لَا تَأْكُلُهُ</a:t>
@@ -21696,6 +21819,7 @@
                   <a:srgbClr val="1B3B6F"/>
                 </a:solidFill>
                 <a:latin typeface="Amiri" pitchFamily="2" charset="-78"/>
+                <a:ea typeface="Amiri" pitchFamily="2" charset="-78"/>
                 <a:cs typeface="Amiri" pitchFamily="2" charset="-78"/>
               </a:rPr>
               <a:t>حَسَاسِيَّةٌ مِنَ الفُولِ السُّودَانِيِّ</a:t>
@@ -21734,6 +21858,7 @@
                   <a:srgbClr val="1B3B6F"/>
                 </a:solidFill>
                 <a:latin typeface="Amiri" pitchFamily="2" charset="-78"/>
+                <a:ea typeface="Amiri" pitchFamily="2" charset="-78"/>
                 <a:cs typeface="Amiri" pitchFamily="2" charset="-78"/>
               </a:rPr>
               <a:t>مُشْكِلَةٌ صِحِّيَّةٌ</a:t>
@@ -21875,6 +22000,7 @@
                   <a:srgbClr val="1B3B6F"/>
                 </a:solidFill>
                 <a:latin typeface="Amiri" pitchFamily="2" charset="-78"/>
+                <a:ea typeface="Amiri" pitchFamily="2" charset="-78"/>
                 <a:cs typeface="Amiri" pitchFamily="2" charset="-78"/>
               </a:rPr>
               <a:t>السِّبَاحَةُ، مَرَّتَيْنِ فِي الأُسْبُوعِ</a:t>
@@ -21913,6 +22039,7 @@
                   <a:srgbClr val="1B3B6F"/>
                 </a:solidFill>
                 <a:latin typeface="Amiri" pitchFamily="2" charset="-78"/>
+                <a:ea typeface="Amiri" pitchFamily="2" charset="-78"/>
                 <a:cs typeface="Amiri" pitchFamily="2" charset="-78"/>
               </a:rPr>
               <a:t>رِيَاضَتُكَ وَكَمْ مَرَّةً</a:t>
@@ -22054,6 +22181,7 @@
                   <a:srgbClr val="1B3B6F"/>
                 </a:solidFill>
                 <a:latin typeface="Amiri" pitchFamily="2" charset="-78"/>
+                <a:ea typeface="Amiri" pitchFamily="2" charset="-78"/>
                 <a:cs typeface="Amiri" pitchFamily="2" charset="-78"/>
               </a:rPr>
               <a:t>بِالطَّائِرَةِ ثُمَّ بِالقِطَارِ</a:t>
@@ -22092,6 +22220,7 @@
                   <a:srgbClr val="1B3B6F"/>
                 </a:solidFill>
                 <a:latin typeface="Amiri" pitchFamily="2" charset="-78"/>
+                <a:ea typeface="Amiri" pitchFamily="2" charset="-78"/>
                 <a:cs typeface="Amiri" pitchFamily="2" charset="-78"/>
               </a:rPr>
               <a:t>كَيْفَ سَتُسَافِرُ؟</a:t>
@@ -22233,6 +22362,7 @@
                   <a:srgbClr val="1B3B6F"/>
                 </a:solidFill>
                 <a:latin typeface="Amiri" pitchFamily="2" charset="-78"/>
+                <a:ea typeface="Amiri" pitchFamily="2" charset="-78"/>
                 <a:cs typeface="Amiri" pitchFamily="2" charset="-78"/>
               </a:rPr>
               <a:t>أُرِيدُ أَنْ أُشَارِكَ لِكَيْ أُحَسِّنَ لُغَتِي العَرَبِيَّةَ وَأَتَعَرَّفَ إِلَى ثَقَافَةٍ جَدِيدَةٍ.</a:t>
@@ -22271,6 +22401,7 @@
                   <a:srgbClr val="1B3B6F"/>
                 </a:solidFill>
                 <a:latin typeface="Amiri" pitchFamily="2" charset="-78"/>
+                <a:ea typeface="Amiri" pitchFamily="2" charset="-78"/>
                 <a:cs typeface="Amiri" pitchFamily="2" charset="-78"/>
               </a:rPr>
               <a:t>جُمْلَةٌ: لِمَاذَا تُرِيدُ أَنْ تُشَارِكَ؟</a:t>
@@ -22480,6 +22611,7 @@
                   <a:srgbClr val="D4AF37"/>
                 </a:solidFill>
                 <a:latin typeface="Amiri" pitchFamily="2" charset="-78"/>
+                <a:ea typeface="Amiri" pitchFamily="2" charset="-78"/>
                 <a:cs typeface="Amiri" pitchFamily="2" charset="-78"/>
               </a:rPr>
               <a:t>م</a:t>
@@ -22800,6 +22932,7 @@
                   <a:srgbClr val="8A6D1E"/>
                 </a:solidFill>
                 <a:latin typeface="Amiri" pitchFamily="2" charset="-78"/>
+                <a:ea typeface="Amiri" pitchFamily="2" charset="-78"/>
                 <a:cs typeface="Amiri" pitchFamily="2" charset="-78"/>
               </a:rPr>
               <a:t>رِسَالَةٌ إِلَى الأُسْرَةِ المُضِيفَةِ</a:t>
@@ -23275,6 +23408,7 @@
                   <a:srgbClr val="1B3B6F"/>
                 </a:solidFill>
                 <a:latin typeface="Amiri" pitchFamily="2" charset="-78"/>
+                <a:ea typeface="Amiri" pitchFamily="2" charset="-78"/>
                 <a:cs typeface="Amiri" pitchFamily="2" charset="-78"/>
               </a:rPr>
               <a:t>أَسْتَيْقِظُ عَادَةً فِي …</a:t>
@@ -23351,6 +23485,7 @@
                   <a:srgbClr val="1B3B6F"/>
                 </a:solidFill>
                 <a:latin typeface="Amiri" pitchFamily="2" charset="-78"/>
+                <a:ea typeface="Amiri" pitchFamily="2" charset="-78"/>
                 <a:cs typeface="Amiri" pitchFamily="2" charset="-78"/>
               </a:rPr>
               <a:t>عِنْدِي حَسَاسِيَّةٌ مِنْ …</a:t>
@@ -23427,6 +23562,7 @@
                   <a:srgbClr val="1B3B6F"/>
                 </a:solidFill>
                 <a:latin typeface="Amiri" pitchFamily="2" charset="-78"/>
+                <a:ea typeface="Amiri" pitchFamily="2" charset="-78"/>
                 <a:cs typeface="Amiri" pitchFamily="2" charset="-78"/>
               </a:rPr>
               <a:t>سَأَصِلُ يَوْمَ … فِي …</a:t>
@@ -23503,6 +23639,7 @@
                   <a:srgbClr val="1B3B6F"/>
                 </a:solidFill>
                 <a:latin typeface="Amiri" pitchFamily="2" charset="-78"/>
+                <a:ea typeface="Amiri" pitchFamily="2" charset="-78"/>
                 <a:cs typeface="Amiri" pitchFamily="2" charset="-78"/>
               </a:rPr>
               <a:t>هَلْ يُمْكِنُ أَنْ تُخْبِرِينِي …؟</a:t>
@@ -23674,6 +23811,7 @@
                   <a:srgbClr val="D4AF37"/>
                 </a:solidFill>
                 <a:latin typeface="Amiri" pitchFamily="2" charset="-78"/>
+                <a:ea typeface="Amiri" pitchFamily="2" charset="-78"/>
                 <a:cs typeface="Amiri" pitchFamily="2" charset="-78"/>
               </a:rPr>
               <a:t>م</a:t>
@@ -23994,6 +24132,7 @@
                   <a:srgbClr val="8A6D1E"/>
                 </a:solidFill>
                 <a:latin typeface="Amiri" pitchFamily="2" charset="-78"/>
+                <a:ea typeface="Amiri" pitchFamily="2" charset="-78"/>
                 <a:cs typeface="Amiri" pitchFamily="2" charset="-78"/>
               </a:rPr>
               <a:t>نَصُّ السُّؤَالِ</a:t>
@@ -24274,6 +24413,7 @@
                   <a:srgbClr val="1B3B6F"/>
                 </a:solidFill>
                 <a:latin typeface="Amiri" pitchFamily="2" charset="-78"/>
+                <a:ea typeface="Amiri" pitchFamily="2" charset="-78"/>
                 <a:cs typeface="Amiri" pitchFamily="2" charset="-78"/>
               </a:rPr>
               <a:t>سَتَسْكُنِينَ مَعَ أُسْرَةٍ عَرَبِيَّةٍ. اكْتُبِي لَهَا رِسَالَةً (٨٠–٩٠ كَلِمَةً).</a:t>
@@ -24415,6 +24555,7 @@
                   <a:srgbClr val="1B3B6F"/>
                 </a:solidFill>
                 <a:latin typeface="Amiri" pitchFamily="2" charset="-78"/>
+                <a:ea typeface="Amiri" pitchFamily="2" charset="-78"/>
                 <a:cs typeface="Amiri" pitchFamily="2" charset="-78"/>
               </a:rPr>
               <a:t>صِفِي رُوتِينَكِ اليَوْمِيَّ.</a:t>
@@ -24556,6 +24697,7 @@
                   <a:srgbClr val="1B3B6F"/>
                 </a:solidFill>
                 <a:latin typeface="Amiri" pitchFamily="2" charset="-78"/>
+                <a:ea typeface="Amiri" pitchFamily="2" charset="-78"/>
                 <a:cs typeface="Amiri" pitchFamily="2" charset="-78"/>
               </a:rPr>
               <a:t>مَا الطَّعَامُ الَّذِي تُحِبِّينَهُ وَلَا تَأْكُلِينَهُ؟ وَهَلْ عِنْدَكِ مُشْكِلَةٌ صِحِّيَّةٌ؟</a:t>
@@ -24697,6 +24839,7 @@
                   <a:srgbClr val="1B3B6F"/>
                 </a:solidFill>
                 <a:latin typeface="Amiri" pitchFamily="2" charset="-78"/>
+                <a:ea typeface="Amiri" pitchFamily="2" charset="-78"/>
                 <a:cs typeface="Amiri" pitchFamily="2" charset="-78"/>
               </a:rPr>
               <a:t>مَاذَا فَعَلْتِ أَمْسِ لِتَسْتَعِدِّي؟ وَمَتَى سَتَصِلِينَ؟</a:t>
@@ -24838,6 +24981,7 @@
                   <a:srgbClr val="1B3B6F"/>
                 </a:solidFill>
                 <a:latin typeface="Amiri" pitchFamily="2" charset="-78"/>
+                <a:ea typeface="Amiri" pitchFamily="2" charset="-78"/>
                 <a:cs typeface="Amiri" pitchFamily="2" charset="-78"/>
               </a:rPr>
               <a:t>اسْأَلِي سُؤَالًا عَنِ الطَّرِيقِ إِلَى البَيْتِ.</a:t>
@@ -25047,6 +25191,7 @@
                   <a:srgbClr val="D4AF37"/>
                 </a:solidFill>
                 <a:latin typeface="Amiri" pitchFamily="2" charset="-78"/>
+                <a:ea typeface="Amiri" pitchFamily="2" charset="-78"/>
                 <a:cs typeface="Amiri" pitchFamily="2" charset="-78"/>
               </a:rPr>
               <a:t>م</a:t>
@@ -25367,6 +25512,7 @@
                   <a:srgbClr val="8A6D1E"/>
                 </a:solidFill>
                 <a:latin typeface="Amiri" pitchFamily="2" charset="-78"/>
+                <a:ea typeface="Amiri" pitchFamily="2" charset="-78"/>
                 <a:cs typeface="Amiri" pitchFamily="2" charset="-78"/>
               </a:rPr>
               <a:t>قَوَالِبُ الكِتَابَةِ</a:t>
@@ -25647,6 +25793,7 @@
                   <a:srgbClr val="1B3B6F"/>
                 </a:solidFill>
                 <a:latin typeface="Amiri" pitchFamily="2" charset="-78"/>
+                <a:ea typeface="Amiri" pitchFamily="2" charset="-78"/>
                 <a:cs typeface="Amiri" pitchFamily="2" charset="-78"/>
               </a:rPr>
               <a:t>عَزِيزَتِي السَّيِّدَةَ ______ ، أَنَا ______ .</a:t>
@@ -25853,6 +26000,7 @@
                   <a:srgbClr val="1B3B6F"/>
                 </a:solidFill>
                 <a:latin typeface="Amiri" pitchFamily="2" charset="-78"/>
+                <a:ea typeface="Amiri" pitchFamily="2" charset="-78"/>
                 <a:cs typeface="Amiri" pitchFamily="2" charset="-78"/>
               </a:rPr>
               <a:t>أَسْتَيْقِظُ عَادَةً فِي ______ ، وَأَنَامُ فِي ______ .</a:t>
@@ -26059,6 +26207,7 @@
                   <a:srgbClr val="1B3B6F"/>
                 </a:solidFill>
                 <a:latin typeface="Amiri" pitchFamily="2" charset="-78"/>
+                <a:ea typeface="Amiri" pitchFamily="2" charset="-78"/>
                 <a:cs typeface="Amiri" pitchFamily="2" charset="-78"/>
               </a:rPr>
               <a:t>أُحِبُّ ______ ، لٰكِنِّي لَا آكُلُ ______ . عِنْدِي ______ .</a:t>
@@ -26265,6 +26414,7 @@
                   <a:srgbClr val="1B3B6F"/>
                 </a:solidFill>
                 <a:latin typeface="Amiri" pitchFamily="2" charset="-78"/>
+                <a:ea typeface="Amiri" pitchFamily="2" charset="-78"/>
                 <a:cs typeface="Amiri" pitchFamily="2" charset="-78"/>
               </a:rPr>
               <a:t>أَمْسِ ______ . سَأَصِلُ يَوْمَ ______ فِي ______ .</a:t>
@@ -26471,6 +26621,7 @@
                   <a:srgbClr val="1B3B6F"/>
                 </a:solidFill>
                 <a:latin typeface="Amiri" pitchFamily="2" charset="-78"/>
+                <a:ea typeface="Amiri" pitchFamily="2" charset="-78"/>
                 <a:cs typeface="Amiri" pitchFamily="2" charset="-78"/>
               </a:rPr>
               <a:t>هَلْ يُمْكِنُ أَنْ تُخْبِرِينِي ______ ؟</a:t>
@@ -26677,6 +26828,7 @@
                   <a:srgbClr val="1B3B6F"/>
                 </a:solidFill>
                 <a:latin typeface="Amiri" pitchFamily="2" charset="-78"/>
+                <a:ea typeface="Amiri" pitchFamily="2" charset="-78"/>
                 <a:cs typeface="Amiri" pitchFamily="2" charset="-78"/>
               </a:rPr>
               <a:t>مَعَ الشُّكْرِ، ______</a:t>
@@ -26916,13 +27068,9 @@
     <a:fontScheme name="Office">
       <a:majorFont>
         <a:latin typeface="Calibri Light" panose="020F0302020204030204"/>
-        <a:ea typeface=""/>
-        <a:cs typeface=""/>
-        <a:font script="Jpan" typeface="游ゴシック Light"/>
-        <a:font script="Hang" typeface="맑은 고딕"/>
-        <a:font script="Hans" typeface="等线 Light"/>
-        <a:font script="Hant" typeface="新細明體"/>
-        <a:font script="Arab" typeface="Times New Roman"/>
+        <a:ea typeface="Amiri" pitchFamily="2" charset="-78"/>
+        <a:cs typeface="Amiri" pitchFamily="2" charset="-78"/>
+        <a:font script="Arab" typeface="Amiri"/>
         <a:font script="Hebr" typeface="Times New Roman"/>
         <a:font script="Thai" typeface="Angsana New"/>
         <a:font script="Ethi" typeface="Nyala"/>
@@ -26968,13 +27116,9 @@
       </a:majorFont>
       <a:minorFont>
         <a:latin typeface="Calibri" panose="020F0502020204030204"/>
-        <a:ea typeface=""/>
-        <a:cs typeface=""/>
-        <a:font script="Jpan" typeface="游ゴシック"/>
-        <a:font script="Hang" typeface="맑은 고딕"/>
-        <a:font script="Hans" typeface="等线"/>
-        <a:font script="Hant" typeface="新細明體"/>
-        <a:font script="Arab" typeface="Arial"/>
+        <a:ea typeface="Amiri" pitchFamily="2" charset="-78"/>
+        <a:cs typeface="Amiri" pitchFamily="2" charset="-78"/>
+        <a:font script="Arab" typeface="Amiri"/>
         <a:font script="Hebr" typeface="Arial"/>
         <a:font script="Thai" typeface="Cordia New"/>
         <a:font script="Ethi" typeface="Nyala"/>

--- a/Topic_A/Exam_Practice/AT-A-L12_Writing_Workshop_Topic_A_Review_and_Assessment.pptx
+++ b/Topic_A/Exam_Practice/AT-A-L12_Writing_Workshop_Topic_A_Review_and_Assessment.pptx
@@ -3848,7 +3848,7 @@
                 <a:solidFill>
                   <a:srgbClr val="FFFFFF"/>
                 </a:solidFill>
-                <a:latin typeface="Calibri" pitchFamily="34" charset="0"/>
+                <a:latin typeface="Amiri" pitchFamily="2" charset="-78"/>
                 <a:ea typeface="Amiri" pitchFamily="2" charset="-78"/>
                 <a:cs typeface="Amiri" pitchFamily="2" charset="-78"/>
               </a:rPr>
@@ -3914,7 +3914,7 @@
                 <a:solidFill>
                   <a:srgbClr val="FFFFFF"/>
                 </a:solidFill>
-                <a:latin typeface="Calibri" pitchFamily="34" charset="0"/>
+                <a:latin typeface="Amiri" pitchFamily="2" charset="-78"/>
                 <a:ea typeface="Amiri" pitchFamily="2" charset="-78"/>
                 <a:cs typeface="Amiri" pitchFamily="2" charset="-78"/>
               </a:rPr>
@@ -3980,7 +3980,7 @@
                 <a:solidFill>
                   <a:srgbClr val="FFFFFF"/>
                 </a:solidFill>
-                <a:latin typeface="Calibri" pitchFamily="34" charset="0"/>
+                <a:latin typeface="Amiri" pitchFamily="2" charset="-78"/>
                 <a:ea typeface="Amiri" pitchFamily="2" charset="-78"/>
                 <a:cs typeface="Amiri" pitchFamily="2" charset="-78"/>
               </a:rPr>
@@ -4046,7 +4046,7 @@
                 <a:solidFill>
                   <a:srgbClr val="FFFFFF"/>
                 </a:solidFill>
-                <a:latin typeface="Calibri" pitchFamily="34" charset="0"/>
+                <a:latin typeface="Amiri" pitchFamily="2" charset="-78"/>
                 <a:ea typeface="Amiri" pitchFamily="2" charset="-78"/>
                 <a:cs typeface="Amiri" pitchFamily="2" charset="-78"/>
               </a:rPr>
@@ -4844,7 +4844,7 @@
                 <a:solidFill>
                   <a:srgbClr val="FFFFFF"/>
                 </a:solidFill>
-                <a:latin typeface="Calibri" pitchFamily="34" charset="0"/>
+                <a:latin typeface="Amiri" pitchFamily="2" charset="-78"/>
                 <a:ea typeface="Amiri" pitchFamily="2" charset="-78"/>
                 <a:cs typeface="Amiri" pitchFamily="2" charset="-78"/>
               </a:rPr>
@@ -4910,7 +4910,7 @@
                 <a:solidFill>
                   <a:srgbClr val="FFFFFF"/>
                 </a:solidFill>
-                <a:latin typeface="Calibri" pitchFamily="34" charset="0"/>
+                <a:latin typeface="Amiri" pitchFamily="2" charset="-78"/>
                 <a:ea typeface="Amiri" pitchFamily="2" charset="-78"/>
                 <a:cs typeface="Amiri" pitchFamily="2" charset="-78"/>
               </a:rPr>
@@ -4976,7 +4976,7 @@
                 <a:solidFill>
                   <a:srgbClr val="FFFFFF"/>
                 </a:solidFill>
-                <a:latin typeface="Calibri" pitchFamily="34" charset="0"/>
+                <a:latin typeface="Amiri" pitchFamily="2" charset="-78"/>
                 <a:ea typeface="Amiri" pitchFamily="2" charset="-78"/>
                 <a:cs typeface="Amiri" pitchFamily="2" charset="-78"/>
               </a:rPr>
@@ -5042,7 +5042,7 @@
                 <a:solidFill>
                   <a:srgbClr val="FFFFFF"/>
                 </a:solidFill>
-                <a:latin typeface="Calibri" pitchFamily="34" charset="0"/>
+                <a:latin typeface="Amiri" pitchFamily="2" charset="-78"/>
                 <a:ea typeface="Amiri" pitchFamily="2" charset="-78"/>
                 <a:cs typeface="Amiri" pitchFamily="2" charset="-78"/>
               </a:rPr>
@@ -8602,7 +8602,7 @@
                 <a:solidFill>
                   <a:srgbClr val="FFFFFF"/>
                 </a:solidFill>
-                <a:latin typeface="Calibri" pitchFamily="34" charset="0"/>
+                <a:latin typeface="Amiri" pitchFamily="2" charset="-78"/>
                 <a:ea typeface="Amiri" pitchFamily="2" charset="-78"/>
                 <a:cs typeface="Amiri" pitchFamily="2" charset="-78"/>
               </a:rPr>
@@ -8668,7 +8668,7 @@
                 <a:solidFill>
                   <a:srgbClr val="FFFFFF"/>
                 </a:solidFill>
-                <a:latin typeface="Calibri" pitchFamily="34" charset="0"/>
+                <a:latin typeface="Amiri" pitchFamily="2" charset="-78"/>
                 <a:ea typeface="Amiri" pitchFamily="2" charset="-78"/>
                 <a:cs typeface="Amiri" pitchFamily="2" charset="-78"/>
               </a:rPr>
@@ -8734,7 +8734,7 @@
                 <a:solidFill>
                   <a:srgbClr val="FFFFFF"/>
                 </a:solidFill>
-                <a:latin typeface="Calibri" pitchFamily="34" charset="0"/>
+                <a:latin typeface="Amiri" pitchFamily="2" charset="-78"/>
                 <a:ea typeface="Amiri" pitchFamily="2" charset="-78"/>
                 <a:cs typeface="Amiri" pitchFamily="2" charset="-78"/>
               </a:rPr>
@@ -8800,7 +8800,7 @@
                 <a:solidFill>
                   <a:srgbClr val="FFFFFF"/>
                 </a:solidFill>
-                <a:latin typeface="Calibri" pitchFamily="34" charset="0"/>
+                <a:latin typeface="Amiri" pitchFamily="2" charset="-78"/>
                 <a:ea typeface="Amiri" pitchFamily="2" charset="-78"/>
                 <a:cs typeface="Amiri" pitchFamily="2" charset="-78"/>
               </a:rPr>
@@ -9587,7 +9587,7 @@
                 <a:solidFill>
                   <a:srgbClr val="FFFFFF"/>
                 </a:solidFill>
-                <a:latin typeface="Calibri" pitchFamily="34" charset="0"/>
+                <a:latin typeface="Amiri" pitchFamily="2" charset="-78"/>
                 <a:ea typeface="Amiri" pitchFamily="2" charset="-78"/>
                 <a:cs typeface="Amiri" pitchFamily="2" charset="-78"/>
               </a:rPr>
@@ -9653,7 +9653,7 @@
                 <a:solidFill>
                   <a:srgbClr val="FFFFFF"/>
                 </a:solidFill>
-                <a:latin typeface="Calibri" pitchFamily="34" charset="0"/>
+                <a:latin typeface="Amiri" pitchFamily="2" charset="-78"/>
                 <a:ea typeface="Amiri" pitchFamily="2" charset="-78"/>
                 <a:cs typeface="Amiri" pitchFamily="2" charset="-78"/>
               </a:rPr>
@@ -9719,7 +9719,7 @@
                 <a:solidFill>
                   <a:srgbClr val="FFFFFF"/>
                 </a:solidFill>
-                <a:latin typeface="Calibri" pitchFamily="34" charset="0"/>
+                <a:latin typeface="Amiri" pitchFamily="2" charset="-78"/>
                 <a:ea typeface="Amiri" pitchFamily="2" charset="-78"/>
                 <a:cs typeface="Amiri" pitchFamily="2" charset="-78"/>
               </a:rPr>
@@ -9785,7 +9785,7 @@
                 <a:solidFill>
                   <a:srgbClr val="FFFFFF"/>
                 </a:solidFill>
-                <a:latin typeface="Calibri" pitchFamily="34" charset="0"/>
+                <a:latin typeface="Amiri" pitchFamily="2" charset="-78"/>
                 <a:ea typeface="Amiri" pitchFamily="2" charset="-78"/>
                 <a:cs typeface="Amiri" pitchFamily="2" charset="-78"/>
               </a:rPr>
@@ -10572,7 +10572,7 @@
                 <a:solidFill>
                   <a:srgbClr val="FFFFFF"/>
                 </a:solidFill>
-                <a:latin typeface="Calibri" pitchFamily="34" charset="0"/>
+                <a:latin typeface="Amiri" pitchFamily="2" charset="-78"/>
                 <a:ea typeface="Amiri" pitchFamily="2" charset="-78"/>
                 <a:cs typeface="Amiri" pitchFamily="2" charset="-78"/>
               </a:rPr>
@@ -10638,7 +10638,7 @@
                 <a:solidFill>
                   <a:srgbClr val="FFFFFF"/>
                 </a:solidFill>
-                <a:latin typeface="Calibri" pitchFamily="34" charset="0"/>
+                <a:latin typeface="Amiri" pitchFamily="2" charset="-78"/>
                 <a:ea typeface="Amiri" pitchFamily="2" charset="-78"/>
                 <a:cs typeface="Amiri" pitchFamily="2" charset="-78"/>
               </a:rPr>
@@ -10704,7 +10704,7 @@
                 <a:solidFill>
                   <a:srgbClr val="FFFFFF"/>
                 </a:solidFill>
-                <a:latin typeface="Calibri" pitchFamily="34" charset="0"/>
+                <a:latin typeface="Amiri" pitchFamily="2" charset="-78"/>
                 <a:ea typeface="Amiri" pitchFamily="2" charset="-78"/>
                 <a:cs typeface="Amiri" pitchFamily="2" charset="-78"/>
               </a:rPr>
@@ -10770,7 +10770,7 @@
                 <a:solidFill>
                   <a:srgbClr val="FFFFFF"/>
                 </a:solidFill>
-                <a:latin typeface="Calibri" pitchFamily="34" charset="0"/>
+                <a:latin typeface="Amiri" pitchFamily="2" charset="-78"/>
                 <a:ea typeface="Amiri" pitchFamily="2" charset="-78"/>
                 <a:cs typeface="Amiri" pitchFamily="2" charset="-78"/>
               </a:rPr>
